--- a/decks/hist-slave-trade/hist-slave-trade_ch3_middle-passage.pptx
+++ b/decks/hist-slave-trade/hist-slave-trade_ch3_middle-passage.pptx
@@ -127,31 +127,31 @@
   <p:extLst>
     <p:ext uri="{521415D9-36F7-43E2-AB2F-B90AF26B5E84}">
       <p14:sectionLst xmlns:p14="http://schemas.microsoft.com/office/powerpoint/2010/main">
-        <p14:section name="Opening" id="{01e36e74-501a-b359-7316-7718a640d52f}">
+        <p14:section name="Opening" id="{f59cf31a-16e9-1a1e-b950-6e63753c6ae4}">
           <p14:sldIdLst>
             <p14:sldId id="256"/>
           </p14:sldIdLst>
         </p14:section>
-        <p14:section name="Gate" id="{8911c2c3-fa83-d93a-05bf-0e45b1909e63}">
+        <p14:section name="Gate" id="{ad5e5095-af52-a0df-07fe-e666a0950865}">
           <p14:sldIdLst>
             <p14:sldId id="257"/>
             <p14:sldId id="258"/>
             <p14:sldId id="259"/>
           </p14:sldIdLst>
         </p14:section>
-        <p14:section name="Pre-teach" id="{85abbf39-7b9a-74e7-0fb1-7a22175dad65}">
+        <p14:section name="Pre-teach" id="{3cb4fc6c-70b7-7a0c-7b7e-642587613923}">
           <p14:sldIdLst>
             <p14:sldId id="260"/>
             <p14:sldId id="261"/>
           </p14:sldIdLst>
         </p14:section>
-        <p14:section name="Read-along" id="{82a92153-4a5b-8c3b-48f9-1252ac5e2128}">
+        <p14:section name="Read-along" id="{0efad5cf-0e69-d680-0ec1-be2db053256c}">
           <p14:sldIdLst>
             <p14:sldId id="262"/>
             <p14:sldId id="263"/>
           </p14:sldIdLst>
         </p14:section>
-        <p14:section name="Teach" id="{678f62aa-1b63-74e4-4c6d-84f588782ef7}">
+        <p14:section name="Teach" id="{19e33f9a-3b7e-c8ca-b251-f30da9cad8dc}">
           <p14:sldIdLst>
             <p14:sldId id="264"/>
             <p14:sldId id="265"/>
@@ -159,7 +159,7 @@
             <p14:sldId id="267"/>
           </p14:sldIdLst>
         </p14:section>
-        <p14:section name="Routes" id="{6bfd5c4c-c915-262c-e266-e9599db37d37}">
+        <p14:section name="Routes" id="{c6c6e75b-eb8c-95a3-24b4-0d5a9ddc213b}">
           <p14:sldIdLst>
             <p14:sldId id="268"/>
             <p14:sldId id="269"/>
@@ -167,12 +167,12 @@
             <p14:sldId id="271"/>
           </p14:sldIdLst>
         </p14:section>
-        <p14:section name="Close" id="{cf04fc54-cdc8-3491-bea6-6b8593c7f71f}">
+        <p14:section name="Close" id="{7a56e3ef-ff61-254b-2a09-6ce58d4f3cf4}">
           <p14:sldIdLst>
             <p14:sldId id="272"/>
           </p14:sldIdLst>
         </p14:section>
-        <p14:section name="Answers" id="{a95f3ce6-e00f-7978-95c2-d58b0b24d6e7}">
+        <p14:section name="Answers" id="{afc7b8f9-06bb-25dc-02b5-e1e26b7fb4b1}">
           <p14:sldIdLst>
             <p14:sldId id="273"/>
             <p14:sldId id="274"/>
@@ -1329,7 +1329,7 @@
               <a:rPr lang="en-US" dirty="0"/>
               <a:t>Exit ticket — individual, silent, on a slip or mini-whiteboard. Recall before help: no notes, no lanes, no hints. Collect before pupils leave.
 Question: Why was it in a ship captain's interest to keep enslaved people alive and fit during the Middle Passage?
-Answer: A   The people were to be sold, and a healthy person fetched a higher price. The captain's income depended on the sale price, and healthy people sold for more. The Zong shows the same logic from the other side: when insurance seemed to pay better than sale, people were killed for the claim.
+Answer: C   The people were to be sold, and a healthy person fetched a higher price. The captain's income depended on the sale price, and healthy people sold for more. The Zong shows the same logic from the other side: when insurance seemed to pay better than sale, people were killed for the claim.
 Source of this question: module 3 task ("The captain's interest") from the manifest.
 Sort the slips: correct → ready to move on; incorrect → start next lesson in the pre-teach group, with the read-along and the Support lane. Same destination next time.</a:t>
             </a:r>
@@ -1606,7 +1606,7 @@
             <a:r>
               <a:rPr lang="en-US" dirty="0"/>
               <a:t>Do now — retrieval. Silent, no notes, no help: recall comes before any support. Give about four minutes.
-1. What was the Middle Passage?  →  A   The journey from West Africa to the Americas on which enslaved people were carried
+1. What was the Middle Passage?  →  C   The journey from West Africa to the Americas on which enslaved people were carried
 2. About one in ___ people died on the Middle Passage before the ship reached land.  →  five
 3. Why did the captain of the Zong throw people into the sea?  →  A   So that the owners could claim money for lost property from the insurance company
 Circulate: who gets 3/3 (Stretch route), 2/3 (Core), 0–1 (Support)? Use this to route pupils later in the lesson.</a:t>
@@ -1789,7 +1789,7 @@
             <a:r>
               <a:rPr lang="en-US" dirty="0"/>
               <a:t>Answers — exit ticket: Exit ticket. Reveal the answer; pupils mark their own work in a different colour, then read the "why" together. Same destination for every lane, so one answer serves the whole class.
-Answer: A   The people were to be sold, and a healthy person fetched a higher price
+Answer: C   The people were to be sold, and a healthy person fetched a higher price
 Why: The captain's income depended on the sale price, and healthy people sold for more. The Zong shows the same logic from the other side: when insurance seemed to pay better than sale, people were killed for the claim.
 Ask a Support pupil to explain one step, and a Stretch pupil to share their extension.</a:t>
             </a:r>
@@ -1880,7 +1880,7 @@
             <a:r>
               <a:rPr lang="en-US" dirty="0"/>
               <a:t>Do now — retrieval. Silent, no notes, no help: recall comes before any support. Give about four minutes.
-1. What was the Middle Passage?  →  A   The journey from West Africa to the Americas on which enslaved people were carried
+1. What was the Middle Passage?  →  C   The journey from West Africa to the Americas on which enslaved people were carried
 2. About one in ___ people died on the Middle Passage before the ship reached land.  →  five
 3. Why did the captain of the Zong throw people into the sea?  →  A   So that the owners could claim money for lost property from the insurance company
 Circulate: who gets 3/3 (Stretch route), 2/3 (Core), 0–1 (Support)? Use this to route pupils later in the lesson.</a:t>
@@ -1972,7 +1972,7 @@
             <a:r>
               <a:rPr lang="en-US" dirty="0"/>
               <a:t>Answers — pupils mark their own in a different colour, then hands up for 3/3, 2/3, 1/3.
-1. A   The journey from West Africa to the Americas on which enslaved people were carried. The Middle Passage was the second leg of the triangle, carrying enslaved people from West Africa to the Americas.
+1. C   The journey from West Africa to the Americas on which enslaved people were carried. The Middle Passage was the second leg of the triangle, carrying enslaved people from West Africa to the Americas.
 2. five. Your lesson gives the figure as about one in five.
 3. A   So that the owners could claim money for lost property from the insurance company. The owners claimed insurance for the people as lost cargo. The case showed that the trade treated people as property.
 Say the route each score points to: 3/3 Stretch, 2/3 Core, 0–1 Support. Pupils may choose to move up.</a:t>
@@ -9340,7 +9340,7 @@
                 <a:ea typeface="Calibri" pitchFamily="34" charset="-122"/>
                 <a:cs typeface="Calibri" pitchFamily="34" charset="-120"/>
               </a:rPr>
-              <a:t>The people were to be sold, and a healthy person fetched a higher price</a:t>
+              <a:t>British law punished captains who lost captives at sea</a:t>
             </a:r>
             <a:endParaRPr lang="en-US" sz="2400" dirty="0"/>
           </a:p>
@@ -9377,7 +9377,7 @@
                 <a:ea typeface="Calibri" pitchFamily="34" charset="-122"/>
                 <a:cs typeface="Calibri" pitchFamily="34" charset="-120"/>
               </a:rPr>
-              <a:t>The captain was paid a fixed wage whatever happened</a:t>
+              <a:t>The captain wanted the people to enjoy the voyage</a:t>
             </a:r>
             <a:endParaRPr lang="en-US" sz="2400" dirty="0"/>
           </a:p>
@@ -9414,7 +9414,7 @@
                 <a:ea typeface="Calibri" pitchFamily="34" charset="-122"/>
                 <a:cs typeface="Calibri" pitchFamily="34" charset="-120"/>
               </a:rPr>
-              <a:t>British law punished captains who lost captives at sea</a:t>
+              <a:t>The people were to be sold, and a healthy person fetched a higher price</a:t>
             </a:r>
             <a:endParaRPr lang="en-US" sz="2400" dirty="0"/>
           </a:p>
@@ -9451,7 +9451,7 @@
                 <a:ea typeface="Calibri" pitchFamily="34" charset="-122"/>
                 <a:cs typeface="Calibri" pitchFamily="34" charset="-120"/>
               </a:rPr>
-              <a:t>The captain wanted the people to enjoy the voyage</a:t>
+              <a:t>The captain was paid a fixed wage whatever happened</a:t>
             </a:r>
             <a:endParaRPr lang="en-US" sz="2400" dirty="0"/>
           </a:p>
@@ -10843,7 +10843,7 @@
                 <a:ea typeface="Calibri" pitchFamily="34" charset="-122"/>
                 <a:cs typeface="Calibri" pitchFamily="34" charset="-120"/>
               </a:rPr>
-              <a:t>The journey from West Africa to the Americas on which enslaved people were carried</a:t>
+              <a:t>The journey from the Americas back to Europe carrying sugar</a:t>
             </a:r>
             <a:endParaRPr lang="en-US" sz="2000" dirty="0"/>
           </a:p>
@@ -10917,7 +10917,7 @@
                 <a:ea typeface="Calibri" pitchFamily="34" charset="-122"/>
                 <a:cs typeface="Calibri" pitchFamily="34" charset="-120"/>
               </a:rPr>
-              <a:t>The march from inland Africa to the coast</a:t>
+              <a:t>The journey from West Africa to the Americas on which enslaved people were carried</a:t>
             </a:r>
             <a:endParaRPr lang="en-US" sz="2000" dirty="0"/>
           </a:p>
@@ -10954,7 +10954,7 @@
                 <a:ea typeface="Calibri" pitchFamily="34" charset="-122"/>
                 <a:cs typeface="Calibri" pitchFamily="34" charset="-120"/>
               </a:rPr>
-              <a:t>The journey from the Americas back to Europe carrying sugar</a:t>
+              <a:t>The march from inland Africa to the coast</a:t>
             </a:r>
             <a:endParaRPr lang="en-US" sz="2000" dirty="0"/>
           </a:p>
@@ -12098,7 +12098,7 @@
                 <a:ea typeface="Cambria" pitchFamily="34" charset="-122"/>
                 <a:cs typeface="Cambria" pitchFamily="34" charset="-120"/>
               </a:rPr>
-              <a:t>A   The people were to be sold, and a healthy person fetched a higher price</a:t>
+              <a:t>C   The people were to be sold, and a healthy person fetched a higher price</a:t>
             </a:r>
             <a:endParaRPr lang="en-US" sz="1800" dirty="0"/>
           </a:p>
@@ -12669,7 +12669,7 @@
                 <a:ea typeface="Calibri" pitchFamily="34" charset="-122"/>
                 <a:cs typeface="Calibri" pitchFamily="34" charset="-120"/>
               </a:rPr>
-              <a:t>Because the ship was sinking and he was saving the crew</a:t>
+              <a:t>Because Parliament had ordered him to</a:t>
             </a:r>
             <a:endParaRPr lang="en-US" sz="2400" dirty="0"/>
           </a:p>
@@ -12706,7 +12706,7 @@
                 <a:ea typeface="Calibri" pitchFamily="34" charset="-122"/>
                 <a:cs typeface="Calibri" pitchFamily="34" charset="-120"/>
               </a:rPr>
-              <a:t>Because the people had asked to leave the ship</a:t>
+              <a:t>Because the ship was sinking and he was saving the crew</a:t>
             </a:r>
             <a:endParaRPr lang="en-US" sz="2400" dirty="0"/>
           </a:p>
@@ -12743,7 +12743,7 @@
                 <a:ea typeface="Calibri" pitchFamily="34" charset="-122"/>
                 <a:cs typeface="Calibri" pitchFamily="34" charset="-120"/>
               </a:rPr>
-              <a:t>Because Parliament had ordered him to</a:t>
+              <a:t>Because the people had asked to leave the ship</a:t>
             </a:r>
             <a:endParaRPr lang="en-US" sz="2400" dirty="0"/>
           </a:p>
@@ -13144,7 +13144,7 @@
                 <a:ea typeface="Calibri" pitchFamily="34" charset="-122"/>
                 <a:cs typeface="Calibri" pitchFamily="34" charset="-120"/>
               </a:rPr>
-              <a:t>A   The journey from West Africa to the Americas on which enslaved people were carried</a:t>
+              <a:t>C   The journey from West Africa to the Americas on which enslaved people were carried</a:t>
             </a:r>
             <a:endParaRPr lang="en-US" sz="2200" dirty="0"/>
           </a:p>

--- a/decks/hist-slave-trade/hist-slave-trade_ch3_middle-passage.pptx
+++ b/decks/hist-slave-trade/hist-slave-trade_ch3_middle-passage.pptx
@@ -127,31 +127,31 @@
   <p:extLst>
     <p:ext uri="{521415D9-36F7-43E2-AB2F-B90AF26B5E84}">
       <p14:sectionLst xmlns:p14="http://schemas.microsoft.com/office/powerpoint/2010/main">
-        <p14:section name="Opening" id="{f59cf31a-16e9-1a1e-b950-6e63753c6ae4}">
+        <p14:section name="Opening" id="{5c620ca3-2bb9-260e-485a-25404964ee40}">
           <p14:sldIdLst>
             <p14:sldId id="256"/>
           </p14:sldIdLst>
         </p14:section>
-        <p14:section name="Gate" id="{ad5e5095-af52-a0df-07fe-e666a0950865}">
+        <p14:section name="Gate" id="{5f6c5c75-489e-e884-6471-43e876546d37}">
           <p14:sldIdLst>
             <p14:sldId id="257"/>
             <p14:sldId id="258"/>
             <p14:sldId id="259"/>
           </p14:sldIdLst>
         </p14:section>
-        <p14:section name="Pre-teach" id="{3cb4fc6c-70b7-7a0c-7b7e-642587613923}">
+        <p14:section name="Pre-teach" id="{1e32d2e3-2230-c3d4-2eab-57b212307f33}">
           <p14:sldIdLst>
             <p14:sldId id="260"/>
             <p14:sldId id="261"/>
           </p14:sldIdLst>
         </p14:section>
-        <p14:section name="Read-along" id="{0efad5cf-0e69-d680-0ec1-be2db053256c}">
+        <p14:section name="Read-along" id="{e3b4d9eb-c317-40a4-25c0-e80ebd58b51a}">
           <p14:sldIdLst>
             <p14:sldId id="262"/>
             <p14:sldId id="263"/>
           </p14:sldIdLst>
         </p14:section>
-        <p14:section name="Teach" id="{19e33f9a-3b7e-c8ca-b251-f30da9cad8dc}">
+        <p14:section name="Teach" id="{414f4114-dc7e-b8db-e69b-292ac7ce8904}">
           <p14:sldIdLst>
             <p14:sldId id="264"/>
             <p14:sldId id="265"/>
@@ -159,7 +159,7 @@
             <p14:sldId id="267"/>
           </p14:sldIdLst>
         </p14:section>
-        <p14:section name="Routes" id="{c6c6e75b-eb8c-95a3-24b4-0d5a9ddc213b}">
+        <p14:section name="Routes" id="{dbf0d1b4-aeb9-48e3-c8ed-bfa554adc307}">
           <p14:sldIdLst>
             <p14:sldId id="268"/>
             <p14:sldId id="269"/>
@@ -167,12 +167,12 @@
             <p14:sldId id="271"/>
           </p14:sldIdLst>
         </p14:section>
-        <p14:section name="Close" id="{7a56e3ef-ff61-254b-2a09-6ce58d4f3cf4}">
+        <p14:section name="Close" id="{d3641d9d-1161-a5a8-f0a5-21b8bd27a235}">
           <p14:sldIdLst>
             <p14:sldId id="272"/>
           </p14:sldIdLst>
         </p14:section>
-        <p14:section name="Answers" id="{afc7b8f9-06bb-25dc-02b5-e1e26b7fb4b1}">
+        <p14:section name="Answers" id="{dd0b2d1a-19a2-4057-cb7a-697136d390bb}">
           <p14:sldIdLst>
             <p14:sldId id="273"/>
             <p14:sldId id="274"/>
